--- a/概要/ゲーム概要書V2_4GA4_善原敬子.pptx
+++ b/概要/ゲーム概要書V2_4GA4_善原敬子.pptx
@@ -5,15 +5,16 @@
     <p:sldMasterId id="2147483684" r:id="rId4"/>
   </p:sldMasterIdLst>
   <p:notesMasterIdLst>
-    <p:notesMasterId r:id="rId8"/>
+    <p:notesMasterId r:id="rId9"/>
   </p:notesMasterIdLst>
   <p:handoutMasterIdLst>
-    <p:handoutMasterId r:id="rId9"/>
+    <p:handoutMasterId r:id="rId10"/>
   </p:handoutMasterIdLst>
   <p:sldIdLst>
     <p:sldId id="440" r:id="rId5"/>
     <p:sldId id="441" r:id="rId6"/>
-    <p:sldId id="442" r:id="rId7"/>
+    <p:sldId id="443" r:id="rId7"/>
+    <p:sldId id="442" r:id="rId8"/>
   </p:sldIdLst>
   <p:sldSz cx="13004800" cy="9753600"/>
   <p:notesSz cx="6858000" cy="9144000"/>
@@ -239,7 +240,7 @@
           <a:p>
             <a:fld id="{06CC78B4-D4EA-4E83-A43A-6FA5A0F7D0B3}" type="datetimeFigureOut">
               <a:rPr kumimoji="1" lang="ja-JP" altLang="en-US" smtClean="0"/>
-              <a:t>2026/4/20</a:t>
+              <a:t>2026/4/23</a:t>
             </a:fld>
             <a:endParaRPr kumimoji="1" lang="ja-JP" altLang="en-US"/>
           </a:p>
@@ -405,7 +406,7 @@
           <a:p>
             <a:fld id="{B3BB1B21-716A-4773-A420-9B5CE6E28AE2}" type="datetimeFigureOut">
               <a:rPr kumimoji="1" lang="ja-JP" altLang="en-US" smtClean="0"/>
-              <a:t>2026/4/20</a:t>
+              <a:t>2026/4/23</a:t>
             </a:fld>
             <a:endParaRPr kumimoji="1" lang="ja-JP" altLang="en-US"/>
           </a:p>
@@ -947,6 +948,90 @@
     </p:spTree>
     <p:extLst>
       <p:ext uri="{BB962C8B-B14F-4D97-AF65-F5344CB8AC3E}">
+        <p14:creationId xmlns:p14="http://schemas.microsoft.com/office/powerpoint/2010/main" val="2216566686"/>
+      </p:ext>
+    </p:extLst>
+  </p:cSld>
+  <p:clrMapOvr>
+    <a:masterClrMapping/>
+  </p:clrMapOvr>
+</p:notes>
+</file>
+
+<file path=ppt/notesSlides/notesSlide4.xml><?xml version="1.0" encoding="utf-8"?>
+<p:notes xmlns:a="http://schemas.openxmlformats.org/drawingml/2006/main" xmlns:r="http://schemas.openxmlformats.org/officeDocument/2006/relationships" xmlns:p="http://schemas.openxmlformats.org/presentationml/2006/main">
+  <p:cSld>
+    <p:spTree>
+      <p:nvGrpSpPr>
+        <p:cNvPr id="1" name=""/>
+        <p:cNvGrpSpPr/>
+        <p:nvPr/>
+      </p:nvGrpSpPr>
+      <p:grpSpPr>
+        <a:xfrm>
+          <a:off x="0" y="0"/>
+          <a:ext cx="0" cy="0"/>
+          <a:chOff x="0" y="0"/>
+          <a:chExt cx="0" cy="0"/>
+        </a:xfrm>
+      </p:grpSpPr>
+      <p:sp>
+        <p:nvSpPr>
+          <p:cNvPr id="2" name="スライド イメージ プレースホルダー 1"/>
+          <p:cNvSpPr>
+            <a:spLocks noGrp="1" noRot="1" noChangeAspect="1"/>
+          </p:cNvSpPr>
+          <p:nvPr>
+            <p:ph type="sldImg"/>
+          </p:nvPr>
+        </p:nvSpPr>
+        <p:spPr/>
+      </p:sp>
+      <p:sp>
+        <p:nvSpPr>
+          <p:cNvPr id="3" name="ノート プレースホルダー 2"/>
+          <p:cNvSpPr>
+            <a:spLocks noGrp="1"/>
+          </p:cNvSpPr>
+          <p:nvPr>
+            <p:ph type="body" idx="1"/>
+          </p:nvPr>
+        </p:nvSpPr>
+        <p:spPr/>
+        <p:txBody>
+          <a:bodyPr/>
+          <a:lstStyle/>
+          <a:p>
+            <a:endParaRPr kumimoji="1" lang="ja-JP" altLang="en-US"/>
+          </a:p>
+        </p:txBody>
+      </p:sp>
+      <p:sp>
+        <p:nvSpPr>
+          <p:cNvPr id="4" name="スライド番号プレースホルダー 3"/>
+          <p:cNvSpPr>
+            <a:spLocks noGrp="1"/>
+          </p:cNvSpPr>
+          <p:nvPr>
+            <p:ph type="sldNum" sz="quarter" idx="10"/>
+          </p:nvPr>
+        </p:nvSpPr>
+        <p:spPr/>
+        <p:txBody>
+          <a:bodyPr/>
+          <a:lstStyle/>
+          <a:p>
+            <a:fld id="{70394227-4E8D-4547-92A9-04B1088AF56D}" type="slidenum">
+              <a:rPr kumimoji="1" lang="ja-JP" altLang="en-US" smtClean="0"/>
+              <a:t>4</a:t>
+            </a:fld>
+            <a:endParaRPr kumimoji="1" lang="ja-JP" altLang="en-US"/>
+          </a:p>
+        </p:txBody>
+      </p:sp>
+    </p:spTree>
+    <p:extLst>
+      <p:ext uri="{BB962C8B-B14F-4D97-AF65-F5344CB8AC3E}">
         <p14:creationId xmlns:p14="http://schemas.microsoft.com/office/powerpoint/2010/main" val="3755145176"/>
       </p:ext>
     </p:extLst>
@@ -1088,7 +1173,7 @@
           <a:p>
             <a:fld id="{12326DE7-6362-45FB-80B6-F8887A987F74}" type="datetime1">
               <a:rPr kumimoji="1" lang="ja-JP" altLang="en-US" smtClean="0"/>
-              <a:t>2026/4/20</a:t>
+              <a:t>2026/4/23</a:t>
             </a:fld>
             <a:endParaRPr kumimoji="1" lang="ja-JP" altLang="en-US"/>
           </a:p>
@@ -1295,7 +1380,7 @@
           <a:p>
             <a:fld id="{12AC9B59-3BF3-4B80-B26E-7562A8BFA88C}" type="datetime1">
               <a:rPr kumimoji="1" lang="ja-JP" altLang="en-US" smtClean="0"/>
-              <a:t>2026/4/20</a:t>
+              <a:t>2026/4/23</a:t>
             </a:fld>
             <a:endParaRPr kumimoji="1" lang="ja-JP" altLang="en-US"/>
           </a:p>
@@ -1507,7 +1592,7 @@
           <a:p>
             <a:fld id="{7179E815-7981-4C74-AEC5-ED53767866CB}" type="datetime1">
               <a:rPr kumimoji="1" lang="ja-JP" altLang="en-US" smtClean="0"/>
-              <a:t>2026/4/20</a:t>
+              <a:t>2026/4/23</a:t>
             </a:fld>
             <a:endParaRPr kumimoji="1" lang="ja-JP" altLang="en-US"/>
           </a:p>
@@ -1709,7 +1794,7 @@
           <a:p>
             <a:fld id="{2354F063-2530-4F1C-AB5B-9D9DE17668FE}" type="datetime1">
               <a:rPr kumimoji="1" lang="ja-JP" altLang="en-US" smtClean="0"/>
-              <a:t>2026/4/20</a:t>
+              <a:t>2026/4/23</a:t>
             </a:fld>
             <a:endParaRPr kumimoji="1" lang="ja-JP" altLang="en-US"/>
           </a:p>
@@ -1958,7 +2043,7 @@
           <a:p>
             <a:fld id="{87494A9C-0BE6-426B-BA97-ED8EA34CDCEB}" type="datetime1">
               <a:rPr kumimoji="1" lang="ja-JP" altLang="en-US" smtClean="0"/>
-              <a:t>2026/4/20</a:t>
+              <a:t>2026/4/23</a:t>
             </a:fld>
             <a:endParaRPr kumimoji="1" lang="ja-JP" altLang="en-US"/>
           </a:p>
@@ -2254,7 +2339,7 @@
           <a:p>
             <a:fld id="{54D701CC-F81F-4FAE-8D03-865955CA638F}" type="datetime1">
               <a:rPr kumimoji="1" lang="ja-JP" altLang="en-US" smtClean="0"/>
-              <a:t>2026/4/20</a:t>
+              <a:t>2026/4/23</a:t>
             </a:fld>
             <a:endParaRPr kumimoji="1" lang="ja-JP" altLang="en-US"/>
           </a:p>
@@ -2685,7 +2770,7 @@
           <a:p>
             <a:fld id="{938D44DF-24CA-43E2-9093-3396243AA9AB}" type="datetime1">
               <a:rPr kumimoji="1" lang="ja-JP" altLang="en-US" smtClean="0"/>
-              <a:t>2026/4/20</a:t>
+              <a:t>2026/4/23</a:t>
             </a:fld>
             <a:endParaRPr kumimoji="1" lang="ja-JP" altLang="en-US"/>
           </a:p>
@@ -2803,7 +2888,7 @@
           <a:p>
             <a:fld id="{0BED3613-0D91-4125-A766-A2F45B449B2D}" type="datetime1">
               <a:rPr kumimoji="1" lang="ja-JP" altLang="en-US" smtClean="0"/>
-              <a:t>2026/4/20</a:t>
+              <a:t>2026/4/23</a:t>
             </a:fld>
             <a:endParaRPr kumimoji="1" lang="ja-JP" altLang="en-US"/>
           </a:p>
@@ -2898,7 +2983,7 @@
           <a:p>
             <a:fld id="{BCACBB27-9AAA-41C2-B253-2D106947EC5E}" type="datetime1">
               <a:rPr kumimoji="1" lang="ja-JP" altLang="en-US" smtClean="0"/>
-              <a:t>2026/4/20</a:t>
+              <a:t>2026/4/23</a:t>
             </a:fld>
             <a:endParaRPr kumimoji="1" lang="ja-JP" altLang="en-US"/>
           </a:p>
@@ -3207,7 +3292,7 @@
           <a:p>
             <a:fld id="{3B4D48FA-3FA4-474C-AE70-9A9080B18688}" type="datetime1">
               <a:rPr kumimoji="1" lang="ja-JP" altLang="en-US" smtClean="0"/>
-              <a:t>2026/4/20</a:t>
+              <a:t>2026/4/23</a:t>
             </a:fld>
             <a:endParaRPr kumimoji="1" lang="ja-JP" altLang="en-US"/>
           </a:p>
@@ -3464,7 +3549,7 @@
           <a:p>
             <a:fld id="{E2B450C2-176F-4CDC-A949-402CABB185D5}" type="datetime1">
               <a:rPr kumimoji="1" lang="ja-JP" altLang="en-US" smtClean="0"/>
-              <a:t>2026/4/20</a:t>
+              <a:t>2026/4/23</a:t>
             </a:fld>
             <a:endParaRPr kumimoji="1" lang="ja-JP" altLang="en-US"/>
           </a:p>
@@ -3709,7 +3794,7 @@
           <a:p>
             <a:fld id="{9E529F21-9341-413A-8868-D34EC7AB7037}" type="datetime1">
               <a:rPr kumimoji="1" lang="ja-JP" altLang="en-US" smtClean="0"/>
-              <a:t>2026/4/20</a:t>
+              <a:t>2026/4/23</a:t>
             </a:fld>
             <a:endParaRPr kumimoji="1" lang="ja-JP" altLang="en-US"/>
           </a:p>
@@ -5295,8 +5380,8 @@
         </p:nvSpPr>
         <p:spPr>
           <a:xfrm>
-            <a:off x="2656139" y="7399058"/>
-            <a:ext cx="10182968" cy="1384995"/>
+            <a:off x="2656139" y="7399057"/>
+            <a:ext cx="10182968" cy="954107"/>
           </a:xfrm>
           <a:prstGeom prst="rect">
             <a:avLst/>
@@ -5323,12 +5408,6 @@
               </a:rPr>
               <a:t>アクション</a:t>
             </a:r>
-            <a:endParaRPr kumimoji="1" lang="en-US" altLang="ja-JP" sz="2800" dirty="0">
-              <a:latin typeface="メイリオ" panose="020B0604030504040204" pitchFamily="50" charset="-128"/>
-              <a:ea typeface="メイリオ" panose="020B0604030504040204" pitchFamily="50" charset="-128"/>
-            </a:endParaRPr>
-          </a:p>
-          <a:p>
             <a:endParaRPr kumimoji="1" lang="en-US" altLang="ja-JP" sz="2800" dirty="0">
               <a:latin typeface="メイリオ" panose="020B0604030504040204" pitchFamily="50" charset="-128"/>
               <a:ea typeface="メイリオ" panose="020B0604030504040204" pitchFamily="50" charset="-128"/>
@@ -6073,7 +6152,7 @@
         <p:spPr>
           <a:xfrm>
             <a:off x="2681290" y="8580770"/>
-            <a:ext cx="10182968" cy="738664"/>
+            <a:ext cx="10182968" cy="1015663"/>
           </a:xfrm>
           <a:prstGeom prst="rect">
             <a:avLst/>
@@ -6093,19 +6172,33 @@
           </a:bodyPr>
           <a:lstStyle/>
           <a:p>
-            <a:endParaRPr kumimoji="1" lang="en-US" altLang="ja-JP" sz="1400" dirty="0">
+            <a:r>
+              <a:rPr kumimoji="1" lang="ja-JP" altLang="en-US" sz="2000" dirty="0">
+                <a:latin typeface="メイリオ" panose="020B0604030504040204" pitchFamily="50" charset="-128"/>
+                <a:ea typeface="メイリオ" panose="020B0604030504040204" pitchFamily="50" charset="-128"/>
+              </a:rPr>
+              <a:t>前作より戦闘に深みをもたせることで、より緊張感のある戦闘を体験できる。</a:t>
+            </a:r>
+            <a:endParaRPr kumimoji="1" lang="en-US" altLang="ja-JP" sz="2000" dirty="0">
               <a:latin typeface="メイリオ" panose="020B0604030504040204" pitchFamily="50" charset="-128"/>
               <a:ea typeface="メイリオ" panose="020B0604030504040204" pitchFamily="50" charset="-128"/>
             </a:endParaRPr>
           </a:p>
           <a:p>
-            <a:endParaRPr kumimoji="1" lang="en-US" altLang="ja-JP" sz="1400" dirty="0">
+            <a:r>
+              <a:rPr kumimoji="1" lang="ja-JP" altLang="en-US" sz="2000" dirty="0">
+                <a:latin typeface="メイリオ" panose="020B0604030504040204" pitchFamily="50" charset="-128"/>
+                <a:ea typeface="メイリオ" panose="020B0604030504040204" pitchFamily="50" charset="-128"/>
+              </a:rPr>
+              <a:t>敵を倒したときの達成感を高め、戦闘以外の演出や要素を増やすことで</a:t>
+            </a:r>
+            <a:endParaRPr kumimoji="1" lang="en-US" altLang="ja-JP" sz="2000" dirty="0">
               <a:latin typeface="メイリオ" panose="020B0604030504040204" pitchFamily="50" charset="-128"/>
               <a:ea typeface="メイリオ" panose="020B0604030504040204" pitchFamily="50" charset="-128"/>
             </a:endParaRPr>
           </a:p>
           <a:p>
-            <a:endParaRPr kumimoji="1" lang="en-US" altLang="ja-JP" sz="1400" dirty="0">
+            <a:endParaRPr kumimoji="1" lang="en-US" altLang="ja-JP" sz="2000" dirty="0">
               <a:latin typeface="メイリオ" panose="020B0604030504040204" pitchFamily="50" charset="-128"/>
               <a:ea typeface="メイリオ" panose="020B0604030504040204" pitchFamily="50" charset="-128"/>
             </a:endParaRPr>
@@ -6152,7 +6245,7 @@
                 <a:latin typeface="メイリオ" panose="020B0604030504040204" pitchFamily="50" charset="-128"/>
                 <a:ea typeface="メイリオ" panose="020B0604030504040204" pitchFamily="50" charset="-128"/>
               </a:rPr>
-              <a:t>旅人が、すたれた劇場で、パリィをくりかえして、観客を盛り上げ、</a:t>
+              <a:t>旅人が、劇場で、パリィをくりかえして、観客を盛り上げ、</a:t>
             </a:r>
             <a:endParaRPr kumimoji="1" lang="en-US" altLang="ja-JP" sz="2400" dirty="0">
               <a:latin typeface="メイリオ" panose="020B0604030504040204" pitchFamily="50" charset="-128"/>
@@ -6632,6 +6725,833 @@
 </file>
 
 <file path=ppt/slides/slide3.xml><?xml version="1.0" encoding="utf-8"?>
+<p:sld xmlns:a="http://schemas.openxmlformats.org/drawingml/2006/main" xmlns:r="http://schemas.openxmlformats.org/officeDocument/2006/relationships" xmlns:p="http://schemas.openxmlformats.org/presentationml/2006/main">
+  <p:cSld>
+    <p:spTree>
+      <p:nvGrpSpPr>
+        <p:cNvPr id="1" name=""/>
+        <p:cNvGrpSpPr/>
+        <p:nvPr/>
+      </p:nvGrpSpPr>
+      <p:grpSpPr>
+        <a:xfrm>
+          <a:off x="0" y="0"/>
+          <a:ext cx="0" cy="0"/>
+          <a:chOff x="0" y="0"/>
+          <a:chExt cx="0" cy="0"/>
+        </a:xfrm>
+      </p:grpSpPr>
+      <p:sp>
+        <p:nvSpPr>
+          <p:cNvPr id="7" name="タイトル 1">
+            <a:extLst>
+              <a:ext uri="{FF2B5EF4-FFF2-40B4-BE49-F238E27FC236}">
+                <a16:creationId xmlns:a16="http://schemas.microsoft.com/office/drawing/2014/main" id="{5EA0190C-6B18-460B-8E7D-D4FE63597C15}"/>
+              </a:ext>
+            </a:extLst>
+          </p:cNvPr>
+          <p:cNvSpPr>
+            <a:spLocks noGrp="1"/>
+          </p:cNvSpPr>
+          <p:nvPr>
+            <p:ph type="title"/>
+          </p:nvPr>
+        </p:nvSpPr>
+        <p:spPr>
+          <a:xfrm>
+            <a:off x="165695" y="251597"/>
+            <a:ext cx="12648261" cy="701660"/>
+          </a:xfrm>
+          <a:solidFill>
+            <a:srgbClr val="002060"/>
+          </a:solidFill>
+          <a:ln w="28575">
+            <a:noFill/>
+          </a:ln>
+        </p:spPr>
+        <p:txBody>
+          <a:bodyPr anchor="b">
+            <a:normAutofit/>
+          </a:bodyPr>
+          <a:lstStyle/>
+          <a:p>
+            <a:pPr algn="l"/>
+            <a:r>
+              <a:rPr lang="ja-JP" altLang="en-US" sz="3600" b="1" dirty="0">
+                <a:solidFill>
+                  <a:schemeClr val="bg1"/>
+                </a:solidFill>
+                <a:latin typeface="メイリオ" panose="020B0604030504040204" pitchFamily="50" charset="-128"/>
+                <a:ea typeface="メイリオ" panose="020B0604030504040204" pitchFamily="50" charset="-128"/>
+              </a:rPr>
+              <a:t>個人目標設定</a:t>
+            </a:r>
+          </a:p>
+        </p:txBody>
+      </p:sp>
+      <p:sp>
+        <p:nvSpPr>
+          <p:cNvPr id="5" name="円/楕円 4"/>
+          <p:cNvSpPr/>
+          <p:nvPr/>
+        </p:nvSpPr>
+        <p:spPr bwMode="auto">
+          <a:xfrm>
+            <a:off x="12332043" y="518984"/>
+            <a:ext cx="799718" cy="799718"/>
+          </a:xfrm>
+          <a:prstGeom prst="ellipse">
+            <a:avLst/>
+          </a:prstGeom>
+          <a:solidFill>
+            <a:schemeClr val="bg1"/>
+          </a:solidFill>
+          <a:ln>
+            <a:noFill/>
+            <a:headEnd type="none" w="med" len="med"/>
+            <a:tailEnd type="none" w="med" len="med"/>
+          </a:ln>
+          <a:effectLst/>
+        </p:spPr>
+        <p:style>
+          <a:lnRef idx="1">
+            <a:schemeClr val="accent1"/>
+          </a:lnRef>
+          <a:fillRef idx="2">
+            <a:schemeClr val="accent1"/>
+          </a:fillRef>
+          <a:effectRef idx="1">
+            <a:schemeClr val="accent1"/>
+          </a:effectRef>
+          <a:fontRef idx="minor">
+            <a:schemeClr val="dk1"/>
+          </a:fontRef>
+        </p:style>
+        <p:txBody>
+          <a:bodyPr vert="horz" wrap="square" lIns="91440" tIns="45720" rIns="91440" bIns="45720" numCol="1" rtlCol="0" anchor="ctr" anchorCtr="0" compatLnSpc="1">
+            <a:prstTxWarp prst="textNoShape">
+              <a:avLst/>
+            </a:prstTxWarp>
+          </a:bodyPr>
+          <a:lstStyle/>
+          <a:p>
+            <a:pPr marL="0" marR="0" indent="0" algn="ctr" defTabSz="914400" rtl="0" eaLnBrk="1" fontAlgn="base" latinLnBrk="0" hangingPunct="1">
+              <a:lnSpc>
+                <a:spcPct val="100000"/>
+              </a:lnSpc>
+              <a:spcBef>
+                <a:spcPct val="0"/>
+              </a:spcBef>
+              <a:spcAft>
+                <a:spcPct val="0"/>
+              </a:spcAft>
+              <a:buClrTx/>
+              <a:buSzTx/>
+              <a:buFontTx/>
+              <a:buNone/>
+              <a:tabLst/>
+            </a:pPr>
+            <a:endParaRPr kumimoji="1" lang="ja-JP" altLang="en-US" sz="2400">
+              <a:solidFill>
+                <a:srgbClr val="000000"/>
+              </a:solidFill>
+              <a:latin typeface="HGP創英角ｺﾞｼｯｸUB" panose="020B0900000000000000" pitchFamily="50" charset="-128"/>
+              <a:ea typeface="HGP創英角ｺﾞｼｯｸUB" panose="020B0900000000000000" pitchFamily="50" charset="-128"/>
+              <a:cs typeface="メイリオ" pitchFamily="50" charset="-128"/>
+            </a:endParaRPr>
+          </a:p>
+        </p:txBody>
+      </p:sp>
+      <p:sp>
+        <p:nvSpPr>
+          <p:cNvPr id="30" name="円/楕円 29"/>
+          <p:cNvSpPr/>
+          <p:nvPr/>
+        </p:nvSpPr>
+        <p:spPr bwMode="auto">
+          <a:xfrm>
+            <a:off x="11886731" y="695776"/>
+            <a:ext cx="235604" cy="235604"/>
+          </a:xfrm>
+          <a:prstGeom prst="ellipse">
+            <a:avLst/>
+          </a:prstGeom>
+          <a:solidFill>
+            <a:schemeClr val="bg1"/>
+          </a:solidFill>
+          <a:ln>
+            <a:noFill/>
+            <a:headEnd type="none" w="med" len="med"/>
+            <a:tailEnd type="none" w="med" len="med"/>
+          </a:ln>
+          <a:effectLst/>
+        </p:spPr>
+        <p:style>
+          <a:lnRef idx="1">
+            <a:schemeClr val="accent1"/>
+          </a:lnRef>
+          <a:fillRef idx="2">
+            <a:schemeClr val="accent1"/>
+          </a:fillRef>
+          <a:effectRef idx="1">
+            <a:schemeClr val="accent1"/>
+          </a:effectRef>
+          <a:fontRef idx="minor">
+            <a:schemeClr val="dk1"/>
+          </a:fontRef>
+        </p:style>
+        <p:txBody>
+          <a:bodyPr vert="horz" wrap="square" lIns="91440" tIns="45720" rIns="91440" bIns="45720" numCol="1" rtlCol="0" anchor="ctr" anchorCtr="0" compatLnSpc="1">
+            <a:prstTxWarp prst="textNoShape">
+              <a:avLst/>
+            </a:prstTxWarp>
+          </a:bodyPr>
+          <a:lstStyle/>
+          <a:p>
+            <a:pPr marL="0" marR="0" indent="0" algn="ctr" defTabSz="914400" rtl="0" eaLnBrk="1" fontAlgn="base" latinLnBrk="0" hangingPunct="1">
+              <a:lnSpc>
+                <a:spcPct val="100000"/>
+              </a:lnSpc>
+              <a:spcBef>
+                <a:spcPct val="0"/>
+              </a:spcBef>
+              <a:spcAft>
+                <a:spcPct val="0"/>
+              </a:spcAft>
+              <a:buClrTx/>
+              <a:buSzTx/>
+              <a:buFontTx/>
+              <a:buNone/>
+              <a:tabLst/>
+            </a:pPr>
+            <a:endParaRPr kumimoji="1" lang="ja-JP" altLang="en-US" sz="2400">
+              <a:solidFill>
+                <a:srgbClr val="000000"/>
+              </a:solidFill>
+              <a:latin typeface="HGP創英角ｺﾞｼｯｸUB" panose="020B0900000000000000" pitchFamily="50" charset="-128"/>
+              <a:ea typeface="HGP創英角ｺﾞｼｯｸUB" panose="020B0900000000000000" pitchFamily="50" charset="-128"/>
+              <a:cs typeface="メイリオ" pitchFamily="50" charset="-128"/>
+            </a:endParaRPr>
+          </a:p>
+        </p:txBody>
+      </p:sp>
+      <p:sp>
+        <p:nvSpPr>
+          <p:cNvPr id="8" name="フローチャート: 端子 7"/>
+          <p:cNvSpPr/>
+          <p:nvPr/>
+        </p:nvSpPr>
+        <p:spPr bwMode="auto">
+          <a:xfrm rot="18469270">
+            <a:off x="11831602" y="-10107"/>
+            <a:ext cx="1376043" cy="256021"/>
+          </a:xfrm>
+          <a:prstGeom prst="flowChartTerminator">
+            <a:avLst/>
+          </a:prstGeom>
+          <a:solidFill>
+            <a:schemeClr val="bg1"/>
+          </a:solidFill>
+          <a:ln>
+            <a:noFill/>
+            <a:headEnd type="none" w="med" len="med"/>
+            <a:tailEnd type="none" w="med" len="med"/>
+          </a:ln>
+          <a:effectLst/>
+        </p:spPr>
+        <p:style>
+          <a:lnRef idx="1">
+            <a:schemeClr val="accent1"/>
+          </a:lnRef>
+          <a:fillRef idx="2">
+            <a:schemeClr val="accent1"/>
+          </a:fillRef>
+          <a:effectRef idx="1">
+            <a:schemeClr val="accent1"/>
+          </a:effectRef>
+          <a:fontRef idx="minor">
+            <a:schemeClr val="dk1"/>
+          </a:fontRef>
+        </p:style>
+        <p:txBody>
+          <a:bodyPr vert="horz" wrap="square" lIns="91440" tIns="45720" rIns="91440" bIns="45720" numCol="1" rtlCol="0" anchor="ctr" anchorCtr="0" compatLnSpc="1">
+            <a:prstTxWarp prst="textNoShape">
+              <a:avLst/>
+            </a:prstTxWarp>
+          </a:bodyPr>
+          <a:lstStyle/>
+          <a:p>
+            <a:pPr marL="0" marR="0" indent="0" algn="ctr" defTabSz="914400" rtl="0" eaLnBrk="1" fontAlgn="base" latinLnBrk="0" hangingPunct="1">
+              <a:lnSpc>
+                <a:spcPct val="100000"/>
+              </a:lnSpc>
+              <a:spcBef>
+                <a:spcPct val="0"/>
+              </a:spcBef>
+              <a:spcAft>
+                <a:spcPct val="0"/>
+              </a:spcAft>
+              <a:buClrTx/>
+              <a:buSzTx/>
+              <a:buFontTx/>
+              <a:buNone/>
+              <a:tabLst/>
+            </a:pPr>
+            <a:endParaRPr kumimoji="1" lang="ja-JP" altLang="en-US" sz="2400">
+              <a:solidFill>
+                <a:srgbClr val="000000"/>
+              </a:solidFill>
+              <a:latin typeface="HGP創英角ｺﾞｼｯｸUB" panose="020B0900000000000000" pitchFamily="50" charset="-128"/>
+              <a:ea typeface="HGP創英角ｺﾞｼｯｸUB" panose="020B0900000000000000" pitchFamily="50" charset="-128"/>
+              <a:cs typeface="メイリオ" pitchFamily="50" charset="-128"/>
+            </a:endParaRPr>
+          </a:p>
+        </p:txBody>
+      </p:sp>
+      <p:sp>
+        <p:nvSpPr>
+          <p:cNvPr id="31" name="フローチャート: 端子 30"/>
+          <p:cNvSpPr/>
+          <p:nvPr/>
+        </p:nvSpPr>
+        <p:spPr bwMode="auto">
+          <a:xfrm rot="18469270">
+            <a:off x="11045329" y="647402"/>
+            <a:ext cx="840692" cy="267022"/>
+          </a:xfrm>
+          <a:prstGeom prst="flowChartTerminator">
+            <a:avLst/>
+          </a:prstGeom>
+          <a:solidFill>
+            <a:schemeClr val="bg1"/>
+          </a:solidFill>
+          <a:ln>
+            <a:noFill/>
+            <a:headEnd type="none" w="med" len="med"/>
+            <a:tailEnd type="none" w="med" len="med"/>
+          </a:ln>
+          <a:effectLst/>
+        </p:spPr>
+        <p:style>
+          <a:lnRef idx="1">
+            <a:schemeClr val="accent1"/>
+          </a:lnRef>
+          <a:fillRef idx="2">
+            <a:schemeClr val="accent1"/>
+          </a:fillRef>
+          <a:effectRef idx="1">
+            <a:schemeClr val="accent1"/>
+          </a:effectRef>
+          <a:fontRef idx="minor">
+            <a:schemeClr val="dk1"/>
+          </a:fontRef>
+        </p:style>
+        <p:txBody>
+          <a:bodyPr vert="horz" wrap="square" lIns="91440" tIns="45720" rIns="91440" bIns="45720" numCol="1" rtlCol="0" anchor="ctr" anchorCtr="0" compatLnSpc="1">
+            <a:prstTxWarp prst="textNoShape">
+              <a:avLst/>
+            </a:prstTxWarp>
+          </a:bodyPr>
+          <a:lstStyle/>
+          <a:p>
+            <a:pPr marL="0" marR="0" indent="0" algn="ctr" defTabSz="914400" rtl="0" eaLnBrk="1" fontAlgn="base" latinLnBrk="0" hangingPunct="1">
+              <a:lnSpc>
+                <a:spcPct val="100000"/>
+              </a:lnSpc>
+              <a:spcBef>
+                <a:spcPct val="0"/>
+              </a:spcBef>
+              <a:spcAft>
+                <a:spcPct val="0"/>
+              </a:spcAft>
+              <a:buClrTx/>
+              <a:buSzTx/>
+              <a:buFontTx/>
+              <a:buNone/>
+              <a:tabLst/>
+            </a:pPr>
+            <a:endParaRPr kumimoji="1" lang="ja-JP" altLang="en-US" sz="2400">
+              <a:solidFill>
+                <a:srgbClr val="000000"/>
+              </a:solidFill>
+              <a:latin typeface="HGP創英角ｺﾞｼｯｸUB" panose="020B0900000000000000" pitchFamily="50" charset="-128"/>
+              <a:ea typeface="HGP創英角ｺﾞｼｯｸUB" panose="020B0900000000000000" pitchFamily="50" charset="-128"/>
+              <a:cs typeface="メイリオ" pitchFamily="50" charset="-128"/>
+            </a:endParaRPr>
+          </a:p>
+        </p:txBody>
+      </p:sp>
+      <p:sp>
+        <p:nvSpPr>
+          <p:cNvPr id="2" name="正方形/長方形 1">
+            <a:extLst>
+              <a:ext uri="{FF2B5EF4-FFF2-40B4-BE49-F238E27FC236}">
+                <a16:creationId xmlns:a16="http://schemas.microsoft.com/office/drawing/2014/main" id="{A4D8CD27-4148-4714-FFA9-31EF424B6B07}"/>
+              </a:ext>
+            </a:extLst>
+          </p:cNvPr>
+          <p:cNvSpPr/>
+          <p:nvPr/>
+        </p:nvSpPr>
+        <p:spPr bwMode="auto">
+          <a:xfrm>
+            <a:off x="165695" y="1193631"/>
+            <a:ext cx="12648260" cy="3937169"/>
+          </a:xfrm>
+          <a:prstGeom prst="rect">
+            <a:avLst/>
+          </a:prstGeom>
+          <a:solidFill>
+            <a:schemeClr val="bg1"/>
+          </a:solidFill>
+          <a:ln w="38100">
+            <a:solidFill>
+              <a:srgbClr val="000000"/>
+            </a:solidFill>
+            <a:headEnd type="none" w="med" len="med"/>
+            <a:tailEnd type="none" w="med" len="med"/>
+          </a:ln>
+          <a:effectLst/>
+        </p:spPr>
+        <p:style>
+          <a:lnRef idx="1">
+            <a:schemeClr val="accent1"/>
+          </a:lnRef>
+          <a:fillRef idx="2">
+            <a:schemeClr val="accent1"/>
+          </a:fillRef>
+          <a:effectRef idx="1">
+            <a:schemeClr val="accent1"/>
+          </a:effectRef>
+          <a:fontRef idx="minor">
+            <a:schemeClr val="dk1"/>
+          </a:fontRef>
+        </p:style>
+        <p:txBody>
+          <a:bodyPr vert="horz" wrap="square" lIns="91440" tIns="45720" rIns="91440" bIns="45720" numCol="1" rtlCol="0" anchor="t" anchorCtr="0" compatLnSpc="1">
+            <a:prstTxWarp prst="textNoShape">
+              <a:avLst/>
+            </a:prstTxWarp>
+          </a:bodyPr>
+          <a:lstStyle/>
+          <a:p>
+            <a:pPr defTabSz="914400" fontAlgn="base">
+              <a:spcBef>
+                <a:spcPct val="0"/>
+              </a:spcBef>
+              <a:spcAft>
+                <a:spcPct val="0"/>
+              </a:spcAft>
+            </a:pPr>
+            <a:r>
+              <a:rPr kumimoji="1" lang="ja-JP" altLang="en-US" sz="2400" dirty="0">
+                <a:solidFill>
+                  <a:srgbClr val="000000"/>
+                </a:solidFill>
+                <a:latin typeface="HGP創英角ｺﾞｼｯｸUB" panose="020B0900000000000000" pitchFamily="50" charset="-128"/>
+                <a:ea typeface="HGP創英角ｺﾞｼｯｸUB" panose="020B0900000000000000" pitchFamily="50" charset="-128"/>
+                <a:cs typeface="メイリオ" pitchFamily="50" charset="-128"/>
+              </a:rPr>
+              <a:t>＜こだわりたいポイント＞</a:t>
+            </a:r>
+            <a:endParaRPr kumimoji="1" lang="en-US" altLang="ja-JP" sz="2400" dirty="0">
+              <a:solidFill>
+                <a:srgbClr val="000000"/>
+              </a:solidFill>
+              <a:latin typeface="HGP創英角ｺﾞｼｯｸUB" panose="020B0900000000000000" pitchFamily="50" charset="-128"/>
+              <a:ea typeface="HGP創英角ｺﾞｼｯｸUB" panose="020B0900000000000000" pitchFamily="50" charset="-128"/>
+              <a:cs typeface="メイリオ" pitchFamily="50" charset="-128"/>
+            </a:endParaRPr>
+          </a:p>
+          <a:p>
+            <a:pPr defTabSz="914400" fontAlgn="base">
+              <a:spcBef>
+                <a:spcPct val="0"/>
+              </a:spcBef>
+              <a:spcAft>
+                <a:spcPct val="0"/>
+              </a:spcAft>
+            </a:pPr>
+            <a:r>
+              <a:rPr kumimoji="1" lang="ja-JP" altLang="en-US" sz="2400" dirty="0">
+                <a:solidFill>
+                  <a:srgbClr val="000000"/>
+                </a:solidFill>
+                <a:latin typeface="HGP創英角ｺﾞｼｯｸUB" panose="020B0900000000000000" pitchFamily="50" charset="-128"/>
+                <a:ea typeface="HGP創英角ｺﾞｼｯｸUB" panose="020B0900000000000000" pitchFamily="50" charset="-128"/>
+                <a:cs typeface="メイリオ" pitchFamily="50" charset="-128"/>
+              </a:rPr>
+              <a:t>・世界観やストーリー性を伝えやすくするためにクリア後の演出もこだわりたい</a:t>
+            </a:r>
+            <a:br>
+              <a:rPr kumimoji="1" lang="en-US" altLang="ja-JP" sz="2400" dirty="0">
+                <a:solidFill>
+                  <a:srgbClr val="000000"/>
+                </a:solidFill>
+                <a:latin typeface="HGP創英角ｺﾞｼｯｸUB" panose="020B0900000000000000" pitchFamily="50" charset="-128"/>
+                <a:ea typeface="HGP創英角ｺﾞｼｯｸUB" panose="020B0900000000000000" pitchFamily="50" charset="-128"/>
+                <a:cs typeface="メイリオ" pitchFamily="50" charset="-128"/>
+              </a:rPr>
+            </a:br>
+            <a:endParaRPr kumimoji="1" lang="en-US" altLang="ja-JP" sz="2400" dirty="0">
+              <a:solidFill>
+                <a:srgbClr val="000000"/>
+              </a:solidFill>
+              <a:latin typeface="HGP創英角ｺﾞｼｯｸUB" panose="020B0900000000000000" pitchFamily="50" charset="-128"/>
+              <a:ea typeface="HGP創英角ｺﾞｼｯｸUB" panose="020B0900000000000000" pitchFamily="50" charset="-128"/>
+              <a:cs typeface="メイリオ" pitchFamily="50" charset="-128"/>
+            </a:endParaRPr>
+          </a:p>
+          <a:p>
+            <a:pPr defTabSz="914400" fontAlgn="base">
+              <a:spcBef>
+                <a:spcPct val="0"/>
+              </a:spcBef>
+              <a:spcAft>
+                <a:spcPct val="0"/>
+              </a:spcAft>
+            </a:pPr>
+            <a:r>
+              <a:rPr kumimoji="1" lang="ja-JP" altLang="en-US" sz="2400" dirty="0">
+                <a:solidFill>
+                  <a:srgbClr val="000000"/>
+                </a:solidFill>
+                <a:latin typeface="HGP創英角ｺﾞｼｯｸUB" panose="020B0900000000000000" pitchFamily="50" charset="-128"/>
+                <a:ea typeface="HGP創英角ｺﾞｼｯｸUB" panose="020B0900000000000000" pitchFamily="50" charset="-128"/>
+                <a:cs typeface="メイリオ" pitchFamily="50" charset="-128"/>
+              </a:rPr>
+              <a:t>・アクションが苦手な人でも楽しめるように設計したい</a:t>
+            </a:r>
+            <a:endParaRPr kumimoji="1" lang="en-US" altLang="ja-JP" sz="2400" dirty="0">
+              <a:solidFill>
+                <a:srgbClr val="000000"/>
+              </a:solidFill>
+              <a:latin typeface="HGP創英角ｺﾞｼｯｸUB" panose="020B0900000000000000" pitchFamily="50" charset="-128"/>
+              <a:ea typeface="HGP創英角ｺﾞｼｯｸUB" panose="020B0900000000000000" pitchFamily="50" charset="-128"/>
+              <a:cs typeface="メイリオ" pitchFamily="50" charset="-128"/>
+            </a:endParaRPr>
+          </a:p>
+        </p:txBody>
+      </p:sp>
+      <p:sp>
+        <p:nvSpPr>
+          <p:cNvPr id="13" name="正方形/長方形 12">
+            <a:extLst>
+              <a:ext uri="{FF2B5EF4-FFF2-40B4-BE49-F238E27FC236}">
+                <a16:creationId xmlns:a16="http://schemas.microsoft.com/office/drawing/2014/main" id="{01CF18E6-C5B9-42CD-91DB-E0E6B15B3355}"/>
+              </a:ext>
+            </a:extLst>
+          </p:cNvPr>
+          <p:cNvSpPr/>
+          <p:nvPr/>
+        </p:nvSpPr>
+        <p:spPr bwMode="auto">
+          <a:xfrm>
+            <a:off x="165695" y="5371174"/>
+            <a:ext cx="12648260" cy="3937169"/>
+          </a:xfrm>
+          <a:prstGeom prst="rect">
+            <a:avLst/>
+          </a:prstGeom>
+          <a:solidFill>
+            <a:schemeClr val="bg1"/>
+          </a:solidFill>
+          <a:ln w="38100">
+            <a:solidFill>
+              <a:srgbClr val="000000"/>
+            </a:solidFill>
+            <a:headEnd type="none" w="med" len="med"/>
+            <a:tailEnd type="none" w="med" len="med"/>
+          </a:ln>
+          <a:effectLst/>
+        </p:spPr>
+        <p:style>
+          <a:lnRef idx="1">
+            <a:schemeClr val="accent1"/>
+          </a:lnRef>
+          <a:fillRef idx="2">
+            <a:schemeClr val="accent1"/>
+          </a:fillRef>
+          <a:effectRef idx="1">
+            <a:schemeClr val="accent1"/>
+          </a:effectRef>
+          <a:fontRef idx="minor">
+            <a:schemeClr val="dk1"/>
+          </a:fontRef>
+        </p:style>
+        <p:txBody>
+          <a:bodyPr vert="horz" wrap="square" lIns="91440" tIns="45720" rIns="91440" bIns="45720" numCol="1" rtlCol="0" anchor="t" anchorCtr="0" compatLnSpc="1">
+            <a:prstTxWarp prst="textNoShape">
+              <a:avLst/>
+            </a:prstTxWarp>
+          </a:bodyPr>
+          <a:lstStyle/>
+          <a:p>
+            <a:pPr defTabSz="914400" fontAlgn="base">
+              <a:spcBef>
+                <a:spcPct val="0"/>
+              </a:spcBef>
+              <a:spcAft>
+                <a:spcPct val="0"/>
+              </a:spcAft>
+            </a:pPr>
+            <a:r>
+              <a:rPr kumimoji="1" lang="ja-JP" altLang="en-US" sz="2400" dirty="0">
+                <a:solidFill>
+                  <a:srgbClr val="000000"/>
+                </a:solidFill>
+                <a:latin typeface="HGP創英角ｺﾞｼｯｸUB" panose="020B0900000000000000" pitchFamily="50" charset="-128"/>
+                <a:ea typeface="HGP創英角ｺﾞｼｯｸUB" panose="020B0900000000000000" pitchFamily="50" charset="-128"/>
+                <a:cs typeface="メイリオ" pitchFamily="50" charset="-128"/>
+              </a:rPr>
+              <a:t>＜挑戦する技術＞</a:t>
+            </a:r>
+            <a:endParaRPr kumimoji="1" lang="en-US" altLang="ja-JP" sz="2400" dirty="0">
+              <a:solidFill>
+                <a:srgbClr val="000000"/>
+              </a:solidFill>
+              <a:latin typeface="HGP創英角ｺﾞｼｯｸUB" panose="020B0900000000000000" pitchFamily="50" charset="-128"/>
+              <a:ea typeface="HGP創英角ｺﾞｼｯｸUB" panose="020B0900000000000000" pitchFamily="50" charset="-128"/>
+              <a:cs typeface="メイリオ" pitchFamily="50" charset="-128"/>
+            </a:endParaRPr>
+          </a:p>
+          <a:p>
+            <a:pPr defTabSz="914400" fontAlgn="base">
+              <a:spcBef>
+                <a:spcPct val="0"/>
+              </a:spcBef>
+              <a:spcAft>
+                <a:spcPct val="0"/>
+              </a:spcAft>
+            </a:pPr>
+            <a:r>
+              <a:rPr kumimoji="1" lang="ja-JP" altLang="en-US" sz="2400" dirty="0">
+                <a:solidFill>
+                  <a:srgbClr val="000000"/>
+                </a:solidFill>
+                <a:latin typeface="HGP創英角ｺﾞｼｯｸUB" panose="020B0900000000000000" pitchFamily="50" charset="-128"/>
+                <a:ea typeface="HGP創英角ｺﾞｼｯｸUB" panose="020B0900000000000000" pitchFamily="50" charset="-128"/>
+                <a:cs typeface="メイリオ" pitchFamily="50" charset="-128"/>
+              </a:rPr>
+              <a:t>・</a:t>
+            </a:r>
+            <a:r>
+              <a:rPr kumimoji="1" lang="en-US" altLang="ja-JP" sz="2400" dirty="0" err="1">
+                <a:solidFill>
+                  <a:srgbClr val="000000"/>
+                </a:solidFill>
+                <a:latin typeface="HGP創英角ｺﾞｼｯｸUB" panose="020B0900000000000000" pitchFamily="50" charset="-128"/>
+                <a:ea typeface="HGP創英角ｺﾞｼｯｸUB" panose="020B0900000000000000" pitchFamily="50" charset="-128"/>
+                <a:cs typeface="メイリオ" pitchFamily="50" charset="-128"/>
+              </a:rPr>
+              <a:t>ImGui</a:t>
+            </a:r>
+            <a:r>
+              <a:rPr kumimoji="1" lang="ja-JP" altLang="en-US" sz="2400" dirty="0">
+                <a:solidFill>
+                  <a:srgbClr val="000000"/>
+                </a:solidFill>
+                <a:latin typeface="HGP創英角ｺﾞｼｯｸUB" panose="020B0900000000000000" pitchFamily="50" charset="-128"/>
+                <a:ea typeface="HGP創英角ｺﾞｼｯｸUB" panose="020B0900000000000000" pitchFamily="50" charset="-128"/>
+                <a:cs typeface="メイリオ" pitchFamily="50" charset="-128"/>
+              </a:rPr>
+              <a:t>を使ったｊｓｏｎデータ編集、保存機能ツール作成。</a:t>
+            </a:r>
+            <a:endParaRPr kumimoji="1" lang="en-US" altLang="ja-JP" sz="2400" dirty="0">
+              <a:solidFill>
+                <a:srgbClr val="000000"/>
+              </a:solidFill>
+              <a:latin typeface="HGP創英角ｺﾞｼｯｸUB" panose="020B0900000000000000" pitchFamily="50" charset="-128"/>
+              <a:ea typeface="HGP創英角ｺﾞｼｯｸUB" panose="020B0900000000000000" pitchFamily="50" charset="-128"/>
+              <a:cs typeface="メイリオ" pitchFamily="50" charset="-128"/>
+            </a:endParaRPr>
+          </a:p>
+          <a:p>
+            <a:pPr defTabSz="914400" fontAlgn="base">
+              <a:spcBef>
+                <a:spcPct val="0"/>
+              </a:spcBef>
+              <a:spcAft>
+                <a:spcPct val="0"/>
+              </a:spcAft>
+            </a:pPr>
+            <a:endParaRPr kumimoji="1" lang="en-US" altLang="ja-JP" sz="2400" dirty="0">
+              <a:solidFill>
+                <a:srgbClr val="000000"/>
+              </a:solidFill>
+              <a:latin typeface="HGP創英角ｺﾞｼｯｸUB" panose="020B0900000000000000" pitchFamily="50" charset="-128"/>
+              <a:ea typeface="HGP創英角ｺﾞｼｯｸUB" panose="020B0900000000000000" pitchFamily="50" charset="-128"/>
+              <a:cs typeface="メイリオ" pitchFamily="50" charset="-128"/>
+            </a:endParaRPr>
+          </a:p>
+          <a:p>
+            <a:pPr defTabSz="914400" fontAlgn="base">
+              <a:spcBef>
+                <a:spcPct val="0"/>
+              </a:spcBef>
+              <a:spcAft>
+                <a:spcPct val="0"/>
+              </a:spcAft>
+            </a:pPr>
+            <a:r>
+              <a:rPr kumimoji="1" lang="ja-JP" altLang="en-US" sz="2400" dirty="0">
+                <a:solidFill>
+                  <a:srgbClr val="000000"/>
+                </a:solidFill>
+                <a:latin typeface="HGP創英角ｺﾞｼｯｸUB" panose="020B0900000000000000" pitchFamily="50" charset="-128"/>
+                <a:ea typeface="HGP創英角ｺﾞｼｯｸUB" panose="020B0900000000000000" pitchFamily="50" charset="-128"/>
+                <a:cs typeface="メイリオ" pitchFamily="50" charset="-128"/>
+              </a:rPr>
+              <a:t>・機能のモジュール化をしつつ、デザインパターンを使って可読性、再利用性、保守性を向上させる</a:t>
+            </a:r>
+            <a:endParaRPr kumimoji="1" lang="en-US" altLang="ja-JP" sz="2400" dirty="0">
+              <a:solidFill>
+                <a:srgbClr val="000000"/>
+              </a:solidFill>
+              <a:latin typeface="HGP創英角ｺﾞｼｯｸUB" panose="020B0900000000000000" pitchFamily="50" charset="-128"/>
+              <a:ea typeface="HGP創英角ｺﾞｼｯｸUB" panose="020B0900000000000000" pitchFamily="50" charset="-128"/>
+              <a:cs typeface="メイリオ" pitchFamily="50" charset="-128"/>
+            </a:endParaRPr>
+          </a:p>
+          <a:p>
+            <a:pPr defTabSz="914400" fontAlgn="base">
+              <a:spcBef>
+                <a:spcPct val="0"/>
+              </a:spcBef>
+              <a:spcAft>
+                <a:spcPct val="0"/>
+              </a:spcAft>
+            </a:pPr>
+            <a:r>
+              <a:rPr kumimoji="1" lang="ja-JP" altLang="en-US" sz="2400" dirty="0">
+                <a:solidFill>
+                  <a:srgbClr val="000000"/>
+                </a:solidFill>
+                <a:latin typeface="HGP創英角ｺﾞｼｯｸUB" panose="020B0900000000000000" pitchFamily="50" charset="-128"/>
+                <a:ea typeface="HGP創英角ｺﾞｼｯｸUB" panose="020B0900000000000000" pitchFamily="50" charset="-128"/>
+                <a:cs typeface="メイリオ" pitchFamily="50" charset="-128"/>
+              </a:rPr>
+              <a:t>（敵にストラテジー、イベントにオブザーバなど</a:t>
+            </a:r>
+            <a:r>
+              <a:rPr kumimoji="1" lang="en-US" altLang="ja-JP" sz="2400" dirty="0" err="1">
+                <a:solidFill>
+                  <a:srgbClr val="000000"/>
+                </a:solidFill>
+                <a:latin typeface="HGP創英角ｺﾞｼｯｸUB" panose="020B0900000000000000" pitchFamily="50" charset="-128"/>
+                <a:ea typeface="HGP創英角ｺﾞｼｯｸUB" panose="020B0900000000000000" pitchFamily="50" charset="-128"/>
+                <a:cs typeface="メイリオ" pitchFamily="50" charset="-128"/>
+              </a:rPr>
+              <a:t>etc</a:t>
+            </a:r>
+            <a:r>
+              <a:rPr kumimoji="1" lang="en-US" altLang="ja-JP" sz="2400" dirty="0">
+                <a:solidFill>
+                  <a:srgbClr val="000000"/>
+                </a:solidFill>
+                <a:latin typeface="HGP創英角ｺﾞｼｯｸUB" panose="020B0900000000000000" pitchFamily="50" charset="-128"/>
+                <a:ea typeface="HGP創英角ｺﾞｼｯｸUB" panose="020B0900000000000000" pitchFamily="50" charset="-128"/>
+                <a:cs typeface="メイリオ" pitchFamily="50" charset="-128"/>
+              </a:rPr>
+              <a:t>…</a:t>
+            </a:r>
+            <a:r>
+              <a:rPr kumimoji="1" lang="ja-JP" altLang="en-US" sz="2400" dirty="0">
+                <a:solidFill>
+                  <a:srgbClr val="000000"/>
+                </a:solidFill>
+                <a:latin typeface="HGP創英角ｺﾞｼｯｸUB" panose="020B0900000000000000" pitchFamily="50" charset="-128"/>
+                <a:ea typeface="HGP創英角ｺﾞｼｯｸUB" panose="020B0900000000000000" pitchFamily="50" charset="-128"/>
+                <a:cs typeface="メイリオ" pitchFamily="50" charset="-128"/>
+              </a:rPr>
+              <a:t>）</a:t>
+            </a:r>
+            <a:endParaRPr kumimoji="1" lang="en-US" altLang="ja-JP" sz="2400" dirty="0">
+              <a:solidFill>
+                <a:srgbClr val="000000"/>
+              </a:solidFill>
+              <a:latin typeface="HGP創英角ｺﾞｼｯｸUB" panose="020B0900000000000000" pitchFamily="50" charset="-128"/>
+              <a:ea typeface="HGP創英角ｺﾞｼｯｸUB" panose="020B0900000000000000" pitchFamily="50" charset="-128"/>
+              <a:cs typeface="メイリオ" pitchFamily="50" charset="-128"/>
+            </a:endParaRPr>
+          </a:p>
+          <a:p>
+            <a:pPr defTabSz="914400" fontAlgn="base">
+              <a:spcBef>
+                <a:spcPct val="0"/>
+              </a:spcBef>
+              <a:spcAft>
+                <a:spcPct val="0"/>
+              </a:spcAft>
+            </a:pPr>
+            <a:br>
+              <a:rPr kumimoji="1" lang="en-US" altLang="ja-JP" sz="2400" dirty="0">
+                <a:solidFill>
+                  <a:srgbClr val="000000"/>
+                </a:solidFill>
+                <a:latin typeface="HGP創英角ｺﾞｼｯｸUB" panose="020B0900000000000000" pitchFamily="50" charset="-128"/>
+                <a:ea typeface="HGP創英角ｺﾞｼｯｸUB" panose="020B0900000000000000" pitchFamily="50" charset="-128"/>
+                <a:cs typeface="メイリオ" pitchFamily="50" charset="-128"/>
+              </a:rPr>
+            </a:br>
+            <a:r>
+              <a:rPr kumimoji="1" lang="ja-JP" altLang="en-US" sz="2400" dirty="0">
+                <a:solidFill>
+                  <a:srgbClr val="000000"/>
+                </a:solidFill>
+                <a:latin typeface="HGP創英角ｺﾞｼｯｸUB" panose="020B0900000000000000" pitchFamily="50" charset="-128"/>
+                <a:ea typeface="HGP創英角ｺﾞｼｯｸUB" panose="020B0900000000000000" pitchFamily="50" charset="-128"/>
+                <a:cs typeface="メイリオ" pitchFamily="50" charset="-128"/>
+              </a:rPr>
+              <a:t>・敵</a:t>
+            </a:r>
+            <a:r>
+              <a:rPr kumimoji="1" lang="en-US" altLang="ja-JP" sz="2400" dirty="0">
+                <a:solidFill>
+                  <a:srgbClr val="000000"/>
+                </a:solidFill>
+                <a:latin typeface="HGP創英角ｺﾞｼｯｸUB" panose="020B0900000000000000" pitchFamily="50" charset="-128"/>
+                <a:ea typeface="HGP創英角ｺﾞｼｯｸUB" panose="020B0900000000000000" pitchFamily="50" charset="-128"/>
+                <a:cs typeface="メイリオ" pitchFamily="50" charset="-128"/>
+              </a:rPr>
+              <a:t>AI</a:t>
+            </a:r>
+            <a:r>
+              <a:rPr kumimoji="1" lang="ja-JP" altLang="en-US" sz="2400" dirty="0">
+                <a:solidFill>
+                  <a:srgbClr val="000000"/>
+                </a:solidFill>
+                <a:latin typeface="HGP創英角ｺﾞｼｯｸUB" panose="020B0900000000000000" pitchFamily="50" charset="-128"/>
+                <a:ea typeface="HGP創英角ｺﾞｼｯｸUB" panose="020B0900000000000000" pitchFamily="50" charset="-128"/>
+                <a:cs typeface="メイリオ" pitchFamily="50" charset="-128"/>
+              </a:rPr>
+              <a:t>制御をもっと細かく</a:t>
+            </a:r>
+            <a:endParaRPr kumimoji="1" lang="en-US" altLang="ja-JP" sz="2400" dirty="0">
+              <a:solidFill>
+                <a:srgbClr val="000000"/>
+              </a:solidFill>
+              <a:latin typeface="HGP創英角ｺﾞｼｯｸUB" panose="020B0900000000000000" pitchFamily="50" charset="-128"/>
+              <a:ea typeface="HGP創英角ｺﾞｼｯｸUB" panose="020B0900000000000000" pitchFamily="50" charset="-128"/>
+              <a:cs typeface="メイリオ" pitchFamily="50" charset="-128"/>
+            </a:endParaRPr>
+          </a:p>
+        </p:txBody>
+      </p:sp>
+    </p:spTree>
+    <p:extLst>
+      <p:ext uri="{BB962C8B-B14F-4D97-AF65-F5344CB8AC3E}">
+        <p14:creationId xmlns:p14="http://schemas.microsoft.com/office/powerpoint/2010/main" val="1535465658"/>
+      </p:ext>
+    </p:extLst>
+  </p:cSld>
+  <p:clrMapOvr>
+    <a:masterClrMapping/>
+  </p:clrMapOvr>
+</p:sld>
+</file>
+
+<file path=ppt/slides/slide4.xml><?xml version="1.0" encoding="utf-8"?>
 <p:sld xmlns:a="http://schemas.openxmlformats.org/drawingml/2006/main" xmlns:r="http://schemas.openxmlformats.org/officeDocument/2006/relationships" xmlns:p="http://schemas.openxmlformats.org/presentationml/2006/main">
   <p:cSld>
     <p:spTree>
@@ -7488,7 +8408,7 @@
         </p:nvSpPr>
         <p:spPr>
           <a:xfrm>
-            <a:off x="4990256" y="1295294"/>
+            <a:off x="4990257" y="1432282"/>
             <a:ext cx="7874001" cy="2308324"/>
           </a:xfrm>
           <a:prstGeom prst="rect">
@@ -7582,7 +8502,7 @@
         </p:nvSpPr>
         <p:spPr>
           <a:xfrm>
-            <a:off x="4990256" y="3920683"/>
+            <a:off x="5012284" y="4315301"/>
             <a:ext cx="7874001" cy="1569660"/>
           </a:xfrm>
           <a:prstGeom prst="rect">
@@ -7892,7 +8812,7 @@
         </p:nvSpPr>
         <p:spPr>
           <a:xfrm>
-            <a:off x="4990381" y="6725027"/>
+            <a:off x="4990257" y="6926292"/>
             <a:ext cx="7874001" cy="2308324"/>
           </a:xfrm>
           <a:prstGeom prst="rect">
